--- a/doc/개발환경_설치매뉴얼(SourceTree).pptx
+++ b/doc/개발환경_설치매뉴얼(SourceTree).pptx
@@ -10,7 +10,6 @@
     <p:sldId id="258" r:id="rId4"/>
     <p:sldId id="259" r:id="rId5"/>
     <p:sldId id="260" r:id="rId6"/>
-    <p:sldId id="261" r:id="rId7"/>
   </p:sldIdLst>
   <p:sldSz cx="12192000" cy="6858000"/>
   <p:notesSz cx="6858000" cy="9144000"/>
@@ -109,6 +108,11 @@
       </a:defRPr>
     </a:lvl9pPr>
   </p:defaultTextStyle>
+  <p:extLst>
+    <p:ext uri="{EFAFB233-063F-42B5-8137-9DF3F51BA10A}">
+      <p15:sldGuideLst xmlns:p15="http://schemas.microsoft.com/office/powerpoint/2012/main"/>
+    </p:ext>
+  </p:extLst>
 </p:presentation>
 </file>
 
@@ -154,10 +158,9 @@
           </a:lstStyle>
           <a:p>
             <a:r>
-              <a:rPr lang="ko-KR" altLang="en-US" smtClean="0"/>
+              <a:rPr lang="ko-KR" altLang="en-US"/>
               <a:t>마스터 제목 스타일 편집</a:t>
             </a:r>
-            <a:endParaRPr lang="ko-KR" altLang="en-US"/>
           </a:p>
         </p:txBody>
       </p:sp>
@@ -219,10 +222,9 @@
           </a:lstStyle>
           <a:p>
             <a:r>
-              <a:rPr lang="ko-KR" altLang="en-US" smtClean="0"/>
+              <a:rPr lang="ko-KR" altLang="en-US"/>
               <a:t>클릭하여 마스터 부제목 스타일 편집</a:t>
             </a:r>
-            <a:endParaRPr lang="ko-KR" altLang="en-US"/>
           </a:p>
         </p:txBody>
       </p:sp>
@@ -243,7 +245,7 @@
           <a:p>
             <a:fld id="{74A8D933-2F53-45D7-9460-5D128D4E54D0}" type="datetimeFigureOut">
               <a:rPr lang="ko-KR" altLang="en-US" smtClean="0"/>
-              <a:t>2025-09-05</a:t>
+              <a:t>2026-01-06</a:t>
             </a:fld>
             <a:endParaRPr lang="ko-KR" altLang="en-US"/>
           </a:p>
@@ -337,10 +339,9 @@
           <a:lstStyle/>
           <a:p>
             <a:r>
-              <a:rPr lang="ko-KR" altLang="en-US" smtClean="0"/>
+              <a:rPr lang="ko-KR" altLang="en-US"/>
               <a:t>마스터 제목 스타일 편집</a:t>
             </a:r>
-            <a:endParaRPr lang="ko-KR" altLang="en-US"/>
           </a:p>
         </p:txBody>
       </p:sp>
@@ -361,38 +362,37 @@
           <a:p>
             <a:pPr lvl="0"/>
             <a:r>
-              <a:rPr lang="ko-KR" altLang="en-US" smtClean="0"/>
+              <a:rPr lang="ko-KR" altLang="en-US"/>
               <a:t>마스터 텍스트 스타일 편집</a:t>
             </a:r>
           </a:p>
           <a:p>
             <a:pPr lvl="1"/>
             <a:r>
-              <a:rPr lang="ko-KR" altLang="en-US" smtClean="0"/>
+              <a:rPr lang="ko-KR" altLang="en-US"/>
               <a:t>둘째 수준</a:t>
             </a:r>
           </a:p>
           <a:p>
             <a:pPr lvl="2"/>
             <a:r>
-              <a:rPr lang="ko-KR" altLang="en-US" smtClean="0"/>
+              <a:rPr lang="ko-KR" altLang="en-US"/>
               <a:t>셋째 수준</a:t>
             </a:r>
           </a:p>
           <a:p>
             <a:pPr lvl="3"/>
             <a:r>
-              <a:rPr lang="ko-KR" altLang="en-US" smtClean="0"/>
+              <a:rPr lang="ko-KR" altLang="en-US"/>
               <a:t>넷째 수준</a:t>
             </a:r>
           </a:p>
           <a:p>
             <a:pPr lvl="4"/>
             <a:r>
-              <a:rPr lang="ko-KR" altLang="en-US" smtClean="0"/>
+              <a:rPr lang="ko-KR" altLang="en-US"/>
               <a:t>다섯째 수준</a:t>
             </a:r>
-            <a:endParaRPr lang="ko-KR" altLang="en-US"/>
           </a:p>
         </p:txBody>
       </p:sp>
@@ -413,7 +413,7 @@
           <a:p>
             <a:fld id="{74A8D933-2F53-45D7-9460-5D128D4E54D0}" type="datetimeFigureOut">
               <a:rPr lang="ko-KR" altLang="en-US" smtClean="0"/>
-              <a:t>2025-09-05</a:t>
+              <a:t>2026-01-06</a:t>
             </a:fld>
             <a:endParaRPr lang="ko-KR" altLang="en-US"/>
           </a:p>
@@ -512,10 +512,9 @@
           <a:lstStyle/>
           <a:p>
             <a:r>
-              <a:rPr lang="ko-KR" altLang="en-US" smtClean="0"/>
+              <a:rPr lang="ko-KR" altLang="en-US"/>
               <a:t>마스터 제목 스타일 편집</a:t>
             </a:r>
-            <a:endParaRPr lang="ko-KR" altLang="en-US"/>
           </a:p>
         </p:txBody>
       </p:sp>
@@ -541,38 +540,37 @@
           <a:p>
             <a:pPr lvl="0"/>
             <a:r>
-              <a:rPr lang="ko-KR" altLang="en-US" smtClean="0"/>
+              <a:rPr lang="ko-KR" altLang="en-US"/>
               <a:t>마스터 텍스트 스타일 편집</a:t>
             </a:r>
           </a:p>
           <a:p>
             <a:pPr lvl="1"/>
             <a:r>
-              <a:rPr lang="ko-KR" altLang="en-US" smtClean="0"/>
+              <a:rPr lang="ko-KR" altLang="en-US"/>
               <a:t>둘째 수준</a:t>
             </a:r>
           </a:p>
           <a:p>
             <a:pPr lvl="2"/>
             <a:r>
-              <a:rPr lang="ko-KR" altLang="en-US" smtClean="0"/>
+              <a:rPr lang="ko-KR" altLang="en-US"/>
               <a:t>셋째 수준</a:t>
             </a:r>
           </a:p>
           <a:p>
             <a:pPr lvl="3"/>
             <a:r>
-              <a:rPr lang="ko-KR" altLang="en-US" smtClean="0"/>
+              <a:rPr lang="ko-KR" altLang="en-US"/>
               <a:t>넷째 수준</a:t>
             </a:r>
           </a:p>
           <a:p>
             <a:pPr lvl="4"/>
             <a:r>
-              <a:rPr lang="ko-KR" altLang="en-US" smtClean="0"/>
+              <a:rPr lang="ko-KR" altLang="en-US"/>
               <a:t>다섯째 수준</a:t>
             </a:r>
-            <a:endParaRPr lang="ko-KR" altLang="en-US"/>
           </a:p>
         </p:txBody>
       </p:sp>
@@ -593,7 +591,7 @@
           <a:p>
             <a:fld id="{74A8D933-2F53-45D7-9460-5D128D4E54D0}" type="datetimeFigureOut">
               <a:rPr lang="ko-KR" altLang="en-US" smtClean="0"/>
-              <a:t>2025-09-05</a:t>
+              <a:t>2026-01-06</a:t>
             </a:fld>
             <a:endParaRPr lang="ko-KR" altLang="en-US"/>
           </a:p>
@@ -687,10 +685,9 @@
           <a:lstStyle/>
           <a:p>
             <a:r>
-              <a:rPr lang="ko-KR" altLang="en-US" smtClean="0"/>
+              <a:rPr lang="ko-KR" altLang="en-US"/>
               <a:t>마스터 제목 스타일 편집</a:t>
             </a:r>
-            <a:endParaRPr lang="ko-KR" altLang="en-US"/>
           </a:p>
         </p:txBody>
       </p:sp>
@@ -711,38 +708,37 @@
           <a:p>
             <a:pPr lvl="0"/>
             <a:r>
-              <a:rPr lang="ko-KR" altLang="en-US" smtClean="0"/>
+              <a:rPr lang="ko-KR" altLang="en-US"/>
               <a:t>마스터 텍스트 스타일 편집</a:t>
             </a:r>
           </a:p>
           <a:p>
             <a:pPr lvl="1"/>
             <a:r>
-              <a:rPr lang="ko-KR" altLang="en-US" smtClean="0"/>
+              <a:rPr lang="ko-KR" altLang="en-US"/>
               <a:t>둘째 수준</a:t>
             </a:r>
           </a:p>
           <a:p>
             <a:pPr lvl="2"/>
             <a:r>
-              <a:rPr lang="ko-KR" altLang="en-US" smtClean="0"/>
+              <a:rPr lang="ko-KR" altLang="en-US"/>
               <a:t>셋째 수준</a:t>
             </a:r>
           </a:p>
           <a:p>
             <a:pPr lvl="3"/>
             <a:r>
-              <a:rPr lang="ko-KR" altLang="en-US" smtClean="0"/>
+              <a:rPr lang="ko-KR" altLang="en-US"/>
               <a:t>넷째 수준</a:t>
             </a:r>
           </a:p>
           <a:p>
             <a:pPr lvl="4"/>
             <a:r>
-              <a:rPr lang="ko-KR" altLang="en-US" smtClean="0"/>
+              <a:rPr lang="ko-KR" altLang="en-US"/>
               <a:t>다섯째 수준</a:t>
             </a:r>
-            <a:endParaRPr lang="ko-KR" altLang="en-US"/>
           </a:p>
         </p:txBody>
       </p:sp>
@@ -763,7 +759,7 @@
           <a:p>
             <a:fld id="{74A8D933-2F53-45D7-9460-5D128D4E54D0}" type="datetimeFigureOut">
               <a:rPr lang="ko-KR" altLang="en-US" smtClean="0"/>
-              <a:t>2025-09-05</a:t>
+              <a:t>2026-01-06</a:t>
             </a:fld>
             <a:endParaRPr lang="ko-KR" altLang="en-US"/>
           </a:p>
@@ -866,10 +862,9 @@
           </a:lstStyle>
           <a:p>
             <a:r>
-              <a:rPr lang="ko-KR" altLang="en-US" smtClean="0"/>
+              <a:rPr lang="ko-KR" altLang="en-US"/>
               <a:t>마스터 제목 스타일 편집</a:t>
             </a:r>
-            <a:endParaRPr lang="ko-KR" altLang="en-US"/>
           </a:p>
         </p:txBody>
       </p:sp>
@@ -986,7 +981,7 @@
           <a:p>
             <a:pPr lvl="0"/>
             <a:r>
-              <a:rPr lang="ko-KR" altLang="en-US" smtClean="0"/>
+              <a:rPr lang="ko-KR" altLang="en-US"/>
               <a:t>마스터 텍스트 스타일 편집</a:t>
             </a:r>
           </a:p>
@@ -1009,7 +1004,7 @@
           <a:p>
             <a:fld id="{74A8D933-2F53-45D7-9460-5D128D4E54D0}" type="datetimeFigureOut">
               <a:rPr lang="ko-KR" altLang="en-US" smtClean="0"/>
-              <a:t>2025-09-05</a:t>
+              <a:t>2026-01-06</a:t>
             </a:fld>
             <a:endParaRPr lang="ko-KR" altLang="en-US"/>
           </a:p>
@@ -1103,10 +1098,9 @@
           <a:lstStyle/>
           <a:p>
             <a:r>
-              <a:rPr lang="ko-KR" altLang="en-US" smtClean="0"/>
+              <a:rPr lang="ko-KR" altLang="en-US"/>
               <a:t>마스터 제목 스타일 편집</a:t>
             </a:r>
-            <a:endParaRPr lang="ko-KR" altLang="en-US"/>
           </a:p>
         </p:txBody>
       </p:sp>
@@ -1132,38 +1126,37 @@
           <a:p>
             <a:pPr lvl="0"/>
             <a:r>
-              <a:rPr lang="ko-KR" altLang="en-US" smtClean="0"/>
+              <a:rPr lang="ko-KR" altLang="en-US"/>
               <a:t>마스터 텍스트 스타일 편집</a:t>
             </a:r>
           </a:p>
           <a:p>
             <a:pPr lvl="1"/>
             <a:r>
-              <a:rPr lang="ko-KR" altLang="en-US" smtClean="0"/>
+              <a:rPr lang="ko-KR" altLang="en-US"/>
               <a:t>둘째 수준</a:t>
             </a:r>
           </a:p>
           <a:p>
             <a:pPr lvl="2"/>
             <a:r>
-              <a:rPr lang="ko-KR" altLang="en-US" smtClean="0"/>
+              <a:rPr lang="ko-KR" altLang="en-US"/>
               <a:t>셋째 수준</a:t>
             </a:r>
           </a:p>
           <a:p>
             <a:pPr lvl="3"/>
             <a:r>
-              <a:rPr lang="ko-KR" altLang="en-US" smtClean="0"/>
+              <a:rPr lang="ko-KR" altLang="en-US"/>
               <a:t>넷째 수준</a:t>
             </a:r>
           </a:p>
           <a:p>
             <a:pPr lvl="4"/>
             <a:r>
-              <a:rPr lang="ko-KR" altLang="en-US" smtClean="0"/>
+              <a:rPr lang="ko-KR" altLang="en-US"/>
               <a:t>다섯째 수준</a:t>
             </a:r>
-            <a:endParaRPr lang="ko-KR" altLang="en-US"/>
           </a:p>
         </p:txBody>
       </p:sp>
@@ -1189,38 +1182,37 @@
           <a:p>
             <a:pPr lvl="0"/>
             <a:r>
-              <a:rPr lang="ko-KR" altLang="en-US" smtClean="0"/>
+              <a:rPr lang="ko-KR" altLang="en-US"/>
               <a:t>마스터 텍스트 스타일 편집</a:t>
             </a:r>
           </a:p>
           <a:p>
             <a:pPr lvl="1"/>
             <a:r>
-              <a:rPr lang="ko-KR" altLang="en-US" smtClean="0"/>
+              <a:rPr lang="ko-KR" altLang="en-US"/>
               <a:t>둘째 수준</a:t>
             </a:r>
           </a:p>
           <a:p>
             <a:pPr lvl="2"/>
             <a:r>
-              <a:rPr lang="ko-KR" altLang="en-US" smtClean="0"/>
+              <a:rPr lang="ko-KR" altLang="en-US"/>
               <a:t>셋째 수준</a:t>
             </a:r>
           </a:p>
           <a:p>
             <a:pPr lvl="3"/>
             <a:r>
-              <a:rPr lang="ko-KR" altLang="en-US" smtClean="0"/>
+              <a:rPr lang="ko-KR" altLang="en-US"/>
               <a:t>넷째 수준</a:t>
             </a:r>
           </a:p>
           <a:p>
             <a:pPr lvl="4"/>
             <a:r>
-              <a:rPr lang="ko-KR" altLang="en-US" smtClean="0"/>
+              <a:rPr lang="ko-KR" altLang="en-US"/>
               <a:t>다섯째 수준</a:t>
             </a:r>
-            <a:endParaRPr lang="ko-KR" altLang="en-US"/>
           </a:p>
         </p:txBody>
       </p:sp>
@@ -1241,7 +1233,7 @@
           <a:p>
             <a:fld id="{74A8D933-2F53-45D7-9460-5D128D4E54D0}" type="datetimeFigureOut">
               <a:rPr lang="ko-KR" altLang="en-US" smtClean="0"/>
-              <a:t>2025-09-05</a:t>
+              <a:t>2026-01-06</a:t>
             </a:fld>
             <a:endParaRPr lang="ko-KR" altLang="en-US"/>
           </a:p>
@@ -1340,10 +1332,9 @@
           <a:lstStyle/>
           <a:p>
             <a:r>
-              <a:rPr lang="ko-KR" altLang="en-US" smtClean="0"/>
+              <a:rPr lang="ko-KR" altLang="en-US"/>
               <a:t>마스터 제목 스타일 편집</a:t>
             </a:r>
-            <a:endParaRPr lang="ko-KR" altLang="en-US"/>
           </a:p>
         </p:txBody>
       </p:sp>
@@ -1406,7 +1397,7 @@
           <a:p>
             <a:pPr lvl="0"/>
             <a:r>
-              <a:rPr lang="ko-KR" altLang="en-US" smtClean="0"/>
+              <a:rPr lang="ko-KR" altLang="en-US"/>
               <a:t>마스터 텍스트 스타일 편집</a:t>
             </a:r>
           </a:p>
@@ -1434,38 +1425,37 @@
           <a:p>
             <a:pPr lvl="0"/>
             <a:r>
-              <a:rPr lang="ko-KR" altLang="en-US" smtClean="0"/>
+              <a:rPr lang="ko-KR" altLang="en-US"/>
               <a:t>마스터 텍스트 스타일 편집</a:t>
             </a:r>
           </a:p>
           <a:p>
             <a:pPr lvl="1"/>
             <a:r>
-              <a:rPr lang="ko-KR" altLang="en-US" smtClean="0"/>
+              <a:rPr lang="ko-KR" altLang="en-US"/>
               <a:t>둘째 수준</a:t>
             </a:r>
           </a:p>
           <a:p>
             <a:pPr lvl="2"/>
             <a:r>
-              <a:rPr lang="ko-KR" altLang="en-US" smtClean="0"/>
+              <a:rPr lang="ko-KR" altLang="en-US"/>
               <a:t>셋째 수준</a:t>
             </a:r>
           </a:p>
           <a:p>
             <a:pPr lvl="3"/>
             <a:r>
-              <a:rPr lang="ko-KR" altLang="en-US" smtClean="0"/>
+              <a:rPr lang="ko-KR" altLang="en-US"/>
               <a:t>넷째 수준</a:t>
             </a:r>
           </a:p>
           <a:p>
             <a:pPr lvl="4"/>
             <a:r>
-              <a:rPr lang="ko-KR" altLang="en-US" smtClean="0"/>
+              <a:rPr lang="ko-KR" altLang="en-US"/>
               <a:t>다섯째 수준</a:t>
             </a:r>
-            <a:endParaRPr lang="ko-KR" altLang="en-US"/>
           </a:p>
         </p:txBody>
       </p:sp>
@@ -1528,7 +1518,7 @@
           <a:p>
             <a:pPr lvl="0"/>
             <a:r>
-              <a:rPr lang="ko-KR" altLang="en-US" smtClean="0"/>
+              <a:rPr lang="ko-KR" altLang="en-US"/>
               <a:t>마스터 텍스트 스타일 편집</a:t>
             </a:r>
           </a:p>
@@ -1556,38 +1546,37 @@
           <a:p>
             <a:pPr lvl="0"/>
             <a:r>
-              <a:rPr lang="ko-KR" altLang="en-US" smtClean="0"/>
+              <a:rPr lang="ko-KR" altLang="en-US"/>
               <a:t>마스터 텍스트 스타일 편집</a:t>
             </a:r>
           </a:p>
           <a:p>
             <a:pPr lvl="1"/>
             <a:r>
-              <a:rPr lang="ko-KR" altLang="en-US" smtClean="0"/>
+              <a:rPr lang="ko-KR" altLang="en-US"/>
               <a:t>둘째 수준</a:t>
             </a:r>
           </a:p>
           <a:p>
             <a:pPr lvl="2"/>
             <a:r>
-              <a:rPr lang="ko-KR" altLang="en-US" smtClean="0"/>
+              <a:rPr lang="ko-KR" altLang="en-US"/>
               <a:t>셋째 수준</a:t>
             </a:r>
           </a:p>
           <a:p>
             <a:pPr lvl="3"/>
             <a:r>
-              <a:rPr lang="ko-KR" altLang="en-US" smtClean="0"/>
+              <a:rPr lang="ko-KR" altLang="en-US"/>
               <a:t>넷째 수준</a:t>
             </a:r>
           </a:p>
           <a:p>
             <a:pPr lvl="4"/>
             <a:r>
-              <a:rPr lang="ko-KR" altLang="en-US" smtClean="0"/>
+              <a:rPr lang="ko-KR" altLang="en-US"/>
               <a:t>다섯째 수준</a:t>
             </a:r>
-            <a:endParaRPr lang="ko-KR" altLang="en-US"/>
           </a:p>
         </p:txBody>
       </p:sp>
@@ -1608,7 +1597,7 @@
           <a:p>
             <a:fld id="{74A8D933-2F53-45D7-9460-5D128D4E54D0}" type="datetimeFigureOut">
               <a:rPr lang="ko-KR" altLang="en-US" smtClean="0"/>
-              <a:t>2025-09-05</a:t>
+              <a:t>2026-01-06</a:t>
             </a:fld>
             <a:endParaRPr lang="ko-KR" altLang="en-US"/>
           </a:p>
@@ -1702,10 +1691,9 @@
           <a:lstStyle/>
           <a:p>
             <a:r>
-              <a:rPr lang="ko-KR" altLang="en-US" smtClean="0"/>
+              <a:rPr lang="ko-KR" altLang="en-US"/>
               <a:t>마스터 제목 스타일 편집</a:t>
             </a:r>
-            <a:endParaRPr lang="ko-KR" altLang="en-US"/>
           </a:p>
         </p:txBody>
       </p:sp>
@@ -1726,7 +1714,7 @@
           <a:p>
             <a:fld id="{74A8D933-2F53-45D7-9460-5D128D4E54D0}" type="datetimeFigureOut">
               <a:rPr lang="ko-KR" altLang="en-US" smtClean="0"/>
-              <a:t>2025-09-05</a:t>
+              <a:t>2026-01-06</a:t>
             </a:fld>
             <a:endParaRPr lang="ko-KR" altLang="en-US"/>
           </a:p>
@@ -1821,7 +1809,7 @@
           <a:p>
             <a:fld id="{74A8D933-2F53-45D7-9460-5D128D4E54D0}" type="datetimeFigureOut">
               <a:rPr lang="ko-KR" altLang="en-US" smtClean="0"/>
-              <a:t>2025-09-05</a:t>
+              <a:t>2026-01-06</a:t>
             </a:fld>
             <a:endParaRPr lang="ko-KR" altLang="en-US"/>
           </a:p>
@@ -1924,10 +1912,9 @@
           </a:lstStyle>
           <a:p>
             <a:r>
-              <a:rPr lang="ko-KR" altLang="en-US" smtClean="0"/>
+              <a:rPr lang="ko-KR" altLang="en-US"/>
               <a:t>마스터 제목 스타일 편집</a:t>
             </a:r>
-            <a:endParaRPr lang="ko-KR" altLang="en-US"/>
           </a:p>
         </p:txBody>
       </p:sp>
@@ -1981,38 +1968,37 @@
           <a:p>
             <a:pPr lvl="0"/>
             <a:r>
-              <a:rPr lang="ko-KR" altLang="en-US" smtClean="0"/>
+              <a:rPr lang="ko-KR" altLang="en-US"/>
               <a:t>마스터 텍스트 스타일 편집</a:t>
             </a:r>
           </a:p>
           <a:p>
             <a:pPr lvl="1"/>
             <a:r>
-              <a:rPr lang="ko-KR" altLang="en-US" smtClean="0"/>
+              <a:rPr lang="ko-KR" altLang="en-US"/>
               <a:t>둘째 수준</a:t>
             </a:r>
           </a:p>
           <a:p>
             <a:pPr lvl="2"/>
             <a:r>
-              <a:rPr lang="ko-KR" altLang="en-US" smtClean="0"/>
+              <a:rPr lang="ko-KR" altLang="en-US"/>
               <a:t>셋째 수준</a:t>
             </a:r>
           </a:p>
           <a:p>
             <a:pPr lvl="3"/>
             <a:r>
-              <a:rPr lang="ko-KR" altLang="en-US" smtClean="0"/>
+              <a:rPr lang="ko-KR" altLang="en-US"/>
               <a:t>넷째 수준</a:t>
             </a:r>
           </a:p>
           <a:p>
             <a:pPr lvl="4"/>
             <a:r>
-              <a:rPr lang="ko-KR" altLang="en-US" smtClean="0"/>
+              <a:rPr lang="ko-KR" altLang="en-US"/>
               <a:t>다섯째 수준</a:t>
             </a:r>
-            <a:endParaRPr lang="ko-KR" altLang="en-US"/>
           </a:p>
         </p:txBody>
       </p:sp>
@@ -2075,7 +2061,7 @@
           <a:p>
             <a:pPr lvl="0"/>
             <a:r>
-              <a:rPr lang="ko-KR" altLang="en-US" smtClean="0"/>
+              <a:rPr lang="ko-KR" altLang="en-US"/>
               <a:t>마스터 텍스트 스타일 편집</a:t>
             </a:r>
           </a:p>
@@ -2098,7 +2084,7 @@
           <a:p>
             <a:fld id="{74A8D933-2F53-45D7-9460-5D128D4E54D0}" type="datetimeFigureOut">
               <a:rPr lang="ko-KR" altLang="en-US" smtClean="0"/>
-              <a:t>2025-09-05</a:t>
+              <a:t>2026-01-06</a:t>
             </a:fld>
             <a:endParaRPr lang="ko-KR" altLang="en-US"/>
           </a:p>
@@ -2201,10 +2187,9 @@
           </a:lstStyle>
           <a:p>
             <a:r>
-              <a:rPr lang="ko-KR" altLang="en-US" smtClean="0"/>
+              <a:rPr lang="ko-KR" altLang="en-US"/>
               <a:t>마스터 제목 스타일 편집</a:t>
             </a:r>
-            <a:endParaRPr lang="ko-KR" altLang="en-US"/>
           </a:p>
         </p:txBody>
       </p:sp>
@@ -2328,7 +2313,7 @@
           <a:p>
             <a:pPr lvl="0"/>
             <a:r>
-              <a:rPr lang="ko-KR" altLang="en-US" smtClean="0"/>
+              <a:rPr lang="ko-KR" altLang="en-US"/>
               <a:t>마스터 텍스트 스타일 편집</a:t>
             </a:r>
           </a:p>
@@ -2351,7 +2336,7 @@
           <a:p>
             <a:fld id="{74A8D933-2F53-45D7-9460-5D128D4E54D0}" type="datetimeFigureOut">
               <a:rPr lang="ko-KR" altLang="en-US" smtClean="0"/>
-              <a:t>2025-09-05</a:t>
+              <a:t>2026-01-06</a:t>
             </a:fld>
             <a:endParaRPr lang="ko-KR" altLang="en-US"/>
           </a:p>
@@ -2460,10 +2445,9 @@
           <a:lstStyle/>
           <a:p>
             <a:r>
-              <a:rPr lang="ko-KR" altLang="en-US" smtClean="0"/>
+              <a:rPr lang="ko-KR" altLang="en-US"/>
               <a:t>마스터 제목 스타일 편집</a:t>
             </a:r>
-            <a:endParaRPr lang="ko-KR" altLang="en-US"/>
           </a:p>
         </p:txBody>
       </p:sp>
@@ -2494,38 +2478,37 @@
           <a:p>
             <a:pPr lvl="0"/>
             <a:r>
-              <a:rPr lang="ko-KR" altLang="en-US" smtClean="0"/>
+              <a:rPr lang="ko-KR" altLang="en-US"/>
               <a:t>마스터 텍스트 스타일 편집</a:t>
             </a:r>
           </a:p>
           <a:p>
             <a:pPr lvl="1"/>
             <a:r>
-              <a:rPr lang="ko-KR" altLang="en-US" smtClean="0"/>
+              <a:rPr lang="ko-KR" altLang="en-US"/>
               <a:t>둘째 수준</a:t>
             </a:r>
           </a:p>
           <a:p>
             <a:pPr lvl="2"/>
             <a:r>
-              <a:rPr lang="ko-KR" altLang="en-US" smtClean="0"/>
+              <a:rPr lang="ko-KR" altLang="en-US"/>
               <a:t>셋째 수준</a:t>
             </a:r>
           </a:p>
           <a:p>
             <a:pPr lvl="3"/>
             <a:r>
-              <a:rPr lang="ko-KR" altLang="en-US" smtClean="0"/>
+              <a:rPr lang="ko-KR" altLang="en-US"/>
               <a:t>넷째 수준</a:t>
             </a:r>
           </a:p>
           <a:p>
             <a:pPr lvl="4"/>
             <a:r>
-              <a:rPr lang="ko-KR" altLang="en-US" smtClean="0"/>
+              <a:rPr lang="ko-KR" altLang="en-US"/>
               <a:t>다섯째 수준</a:t>
             </a:r>
-            <a:endParaRPr lang="ko-KR" altLang="en-US"/>
           </a:p>
         </p:txBody>
       </p:sp>
@@ -2564,7 +2547,7 @@
           <a:p>
             <a:fld id="{74A8D933-2F53-45D7-9460-5D128D4E54D0}" type="datetimeFigureOut">
               <a:rPr lang="ko-KR" altLang="en-US" smtClean="0"/>
-              <a:t>2025-09-05</a:t>
+              <a:t>2026-01-06</a:t>
             </a:fld>
             <a:endParaRPr lang="ko-KR" altLang="en-US"/>
           </a:p>
@@ -2984,7 +2967,14 @@
           <a:bodyPr/>
           <a:lstStyle/>
           <a:p>
-            <a:endParaRPr lang="ko-KR" altLang="en-US"/>
+            <a:r>
+              <a:rPr lang="en-US" altLang="ko-KR" dirty="0"/>
+              <a:t>SourceTree</a:t>
+            </a:r>
+            <a:r>
+              <a:rPr lang="ko-KR" altLang="en-US" dirty="0"/>
+              <a:t> 설치 매뉴얼</a:t>
+            </a:r>
           </a:p>
         </p:txBody>
       </p:sp>
@@ -3311,81 +3301,6 @@
     <p:extLst>
       <p:ext uri="{BB962C8B-B14F-4D97-AF65-F5344CB8AC3E}">
         <p14:creationId xmlns:p14="http://schemas.microsoft.com/office/powerpoint/2010/main" val="2194834529"/>
-      </p:ext>
-    </p:extLst>
-  </p:cSld>
-  <p:clrMapOvr>
-    <a:masterClrMapping/>
-  </p:clrMapOvr>
-</p:sld>
-</file>
-
-<file path=ppt/slides/slide6.xml><?xml version="1.0" encoding="utf-8"?>
-<p:sld xmlns:a="http://schemas.openxmlformats.org/drawingml/2006/main" xmlns:r="http://schemas.openxmlformats.org/officeDocument/2006/relationships" xmlns:p="http://schemas.openxmlformats.org/presentationml/2006/main">
-  <p:cSld>
-    <p:spTree>
-      <p:nvGrpSpPr>
-        <p:cNvPr id="1" name=""/>
-        <p:cNvGrpSpPr/>
-        <p:nvPr/>
-      </p:nvGrpSpPr>
-      <p:grpSpPr>
-        <a:xfrm>
-          <a:off x="0" y="0"/>
-          <a:ext cx="0" cy="0"/>
-          <a:chOff x="0" y="0"/>
-          <a:chExt cx="0" cy="0"/>
-        </a:xfrm>
-      </p:grpSpPr>
-      <p:sp>
-        <p:nvSpPr>
-          <p:cNvPr id="2" name="제목 1"/>
-          <p:cNvSpPr>
-            <a:spLocks noGrp="1"/>
-          </p:cNvSpPr>
-          <p:nvPr>
-            <p:ph type="title"/>
-          </p:nvPr>
-        </p:nvSpPr>
-        <p:spPr/>
-        <p:txBody>
-          <a:bodyPr/>
-          <a:lstStyle/>
-          <a:p>
-            <a:endParaRPr lang="ko-KR" altLang="en-US"/>
-          </a:p>
-        </p:txBody>
-      </p:sp>
-      <p:pic>
-        <p:nvPicPr>
-          <p:cNvPr id="4" name="내용 개체 틀 3"/>
-          <p:cNvPicPr>
-            <a:picLocks noGrp="1" noChangeAspect="1"/>
-          </p:cNvPicPr>
-          <p:nvPr>
-            <p:ph idx="1"/>
-          </p:nvPr>
-        </p:nvPicPr>
-        <p:blipFill>
-          <a:blip r:embed="rId2"/>
-          <a:stretch>
-            <a:fillRect/>
-          </a:stretch>
-        </p:blipFill>
-        <p:spPr>
-          <a:xfrm>
-            <a:off x="3122431" y="1825625"/>
-            <a:ext cx="5947137" cy="4351338"/>
-          </a:xfrm>
-          <a:prstGeom prst="rect">
-            <a:avLst/>
-          </a:prstGeom>
-        </p:spPr>
-      </p:pic>
-    </p:spTree>
-    <p:extLst>
-      <p:ext uri="{BB962C8B-B14F-4D97-AF65-F5344CB8AC3E}">
-        <p14:creationId xmlns:p14="http://schemas.microsoft.com/office/powerpoint/2010/main" val="3183595074"/>
       </p:ext>
     </p:extLst>
   </p:cSld>
